--- a/tests/output/pptx-test/01-all-17-types.pptx
+++ b/tests/output/pptx-test/01-all-17-types.pptx
@@ -318,7 +318,7 @@
                                   <p:strVal val="visible"/>
                                 </p:to>
                               </p:set>
-                              <p:animEffect transition="in">
+                              <p:animEffect transition="in" filter="wipe(right)">
                                 <p:cBhvr>
                                   <p:cTn id="6" dur="500" fill="hold"/>
                                   <p:tgtEl>
